--- a/public/videos/repositories/walkmap/walkmap-tech-preview.pptx
+++ b/public/videos/repositories/walkmap/walkmap-tech-preview.pptx
@@ -134,7 +134,7 @@
           <p:cNvPr id="2" name="タイトル 1">
             <a:extLst>
               <a:ext uri="{FF2B5EF4-FFF2-40B4-BE49-F238E27FC236}">
-                <a16:creationId xmlns:a16="http://schemas.microsoft.com/office/drawing/2014/main" id="{E23A5044-119F-D094-66CC-5B440AAF4AC2}"/>
+                <a16:creationId xmlns:a16="http://schemas.microsoft.com/office/drawing/2014/main" id="{4D2B7F46-6CFC-E72E-1DEC-D1B0FE8C2829}"/>
               </a:ext>
             </a:extLst>
           </p:cNvPr>
@@ -171,7 +171,7 @@
           <p:cNvPr id="3" name="字幕 2">
             <a:extLst>
               <a:ext uri="{FF2B5EF4-FFF2-40B4-BE49-F238E27FC236}">
-                <a16:creationId xmlns:a16="http://schemas.microsoft.com/office/drawing/2014/main" id="{96ACCEF4-2B01-25EE-3C41-7538EAB4DE6D}"/>
+                <a16:creationId xmlns:a16="http://schemas.microsoft.com/office/drawing/2014/main" id="{652B635A-9D2A-5849-CAE4-51BCAE242088}"/>
               </a:ext>
             </a:extLst>
           </p:cNvPr>
@@ -241,7 +241,7 @@
           <p:cNvPr id="4" name="日付プレースホルダー 3">
             <a:extLst>
               <a:ext uri="{FF2B5EF4-FFF2-40B4-BE49-F238E27FC236}">
-                <a16:creationId xmlns:a16="http://schemas.microsoft.com/office/drawing/2014/main" id="{B7B9D940-A2FF-9CAE-2BF6-12E4AA608E60}"/>
+                <a16:creationId xmlns:a16="http://schemas.microsoft.com/office/drawing/2014/main" id="{49D2FE9C-07FA-939E-56B5-5AC2A695EDE3}"/>
               </a:ext>
             </a:extLst>
           </p:cNvPr>
@@ -257,7 +257,7 @@
           <a:bodyPr/>
           <a:lstStyle/>
           <a:p>
-            <a:fld id="{5841EDD6-1B1F-4CBA-B0EB-41010B145F50}" type="datetimeFigureOut">
+            <a:fld id="{1A4E5DBB-9B5B-477B-ACE4-ED02908BB91D}" type="datetimeFigureOut">
               <a:rPr kumimoji="1" lang="ja-JP" altLang="en-US" smtClean="0"/>
               <a:t>2026/7/30</a:t>
             </a:fld>
@@ -270,7 +270,7 @@
           <p:cNvPr id="5" name="フッター プレースホルダー 4">
             <a:extLst>
               <a:ext uri="{FF2B5EF4-FFF2-40B4-BE49-F238E27FC236}">
-                <a16:creationId xmlns:a16="http://schemas.microsoft.com/office/drawing/2014/main" id="{42373805-91CE-BE13-346B-40AE4BB98996}"/>
+                <a16:creationId xmlns:a16="http://schemas.microsoft.com/office/drawing/2014/main" id="{77F3EC3D-DC83-133F-1F81-B14BD23B57AB}"/>
               </a:ext>
             </a:extLst>
           </p:cNvPr>
@@ -295,7 +295,7 @@
           <p:cNvPr id="6" name="スライド番号プレースホルダー 5">
             <a:extLst>
               <a:ext uri="{FF2B5EF4-FFF2-40B4-BE49-F238E27FC236}">
-                <a16:creationId xmlns:a16="http://schemas.microsoft.com/office/drawing/2014/main" id="{3266F130-E6BE-781E-82DE-915632870A56}"/>
+                <a16:creationId xmlns:a16="http://schemas.microsoft.com/office/drawing/2014/main" id="{6AC9D67B-0881-6F28-34ED-0A9E3CD5C564}"/>
               </a:ext>
             </a:extLst>
           </p:cNvPr>
@@ -311,7 +311,7 @@
           <a:bodyPr/>
           <a:lstStyle/>
           <a:p>
-            <a:fld id="{0FC57F99-FC4C-44B4-A3C7-BF624CE3CBB2}" type="slidenum">
+            <a:fld id="{35C663DD-B40A-4BAB-AE30-2DFA18315334}" type="slidenum">
               <a:rPr kumimoji="1" lang="ja-JP" altLang="en-US" smtClean="0"/>
               <a:t>‹#›</a:t>
             </a:fld>
@@ -322,7 +322,7 @@
     </p:spTree>
     <p:extLst>
       <p:ext uri="{BB962C8B-B14F-4D97-AF65-F5344CB8AC3E}">
-        <p14:creationId xmlns:p14="http://schemas.microsoft.com/office/powerpoint/2010/main" val="1817214078"/>
+        <p14:creationId xmlns:p14="http://schemas.microsoft.com/office/powerpoint/2010/main" val="3580299573"/>
       </p:ext>
     </p:extLst>
   </p:cSld>
@@ -354,7 +354,7 @@
           <p:cNvPr id="2" name="タイトル 1">
             <a:extLst>
               <a:ext uri="{FF2B5EF4-FFF2-40B4-BE49-F238E27FC236}">
-                <a16:creationId xmlns:a16="http://schemas.microsoft.com/office/drawing/2014/main" id="{295972FB-EF42-4264-482A-0EC40D726462}"/>
+                <a16:creationId xmlns:a16="http://schemas.microsoft.com/office/drawing/2014/main" id="{55ACA40E-9382-BB80-DCBE-7479D6873DE7}"/>
               </a:ext>
             </a:extLst>
           </p:cNvPr>
@@ -382,7 +382,7 @@
           <p:cNvPr id="3" name="縦書きテキスト プレースホルダー 2">
             <a:extLst>
               <a:ext uri="{FF2B5EF4-FFF2-40B4-BE49-F238E27FC236}">
-                <a16:creationId xmlns:a16="http://schemas.microsoft.com/office/drawing/2014/main" id="{6B6A550C-47FD-3812-8A6B-A45BDE52E2F5}"/>
+                <a16:creationId xmlns:a16="http://schemas.microsoft.com/office/drawing/2014/main" id="{E63FE5AD-429F-6D60-A7E4-708BCEEFAA49}"/>
               </a:ext>
             </a:extLst>
           </p:cNvPr>
@@ -471,7 +471,7 @@
           <p:cNvPr id="4" name="日付プレースホルダー 3">
             <a:extLst>
               <a:ext uri="{FF2B5EF4-FFF2-40B4-BE49-F238E27FC236}">
-                <a16:creationId xmlns:a16="http://schemas.microsoft.com/office/drawing/2014/main" id="{36A61225-F55D-24F6-9D38-189F0E5A65A6}"/>
+                <a16:creationId xmlns:a16="http://schemas.microsoft.com/office/drawing/2014/main" id="{30873DA4-93EE-3369-702D-2C46A83081D0}"/>
               </a:ext>
             </a:extLst>
           </p:cNvPr>
@@ -487,7 +487,7 @@
           <a:bodyPr/>
           <a:lstStyle/>
           <a:p>
-            <a:fld id="{5841EDD6-1B1F-4CBA-B0EB-41010B145F50}" type="datetimeFigureOut">
+            <a:fld id="{1A4E5DBB-9B5B-477B-ACE4-ED02908BB91D}" type="datetimeFigureOut">
               <a:rPr kumimoji="1" lang="ja-JP" altLang="en-US" smtClean="0"/>
               <a:t>2026/7/30</a:t>
             </a:fld>
@@ -500,7 +500,7 @@
           <p:cNvPr id="5" name="フッター プレースホルダー 4">
             <a:extLst>
               <a:ext uri="{FF2B5EF4-FFF2-40B4-BE49-F238E27FC236}">
-                <a16:creationId xmlns:a16="http://schemas.microsoft.com/office/drawing/2014/main" id="{25F8798B-83E6-5A98-3D20-923DFA60CE5F}"/>
+                <a16:creationId xmlns:a16="http://schemas.microsoft.com/office/drawing/2014/main" id="{694CEBBE-4A73-1BEF-B302-747BA26AE3D2}"/>
               </a:ext>
             </a:extLst>
           </p:cNvPr>
@@ -525,7 +525,7 @@
           <p:cNvPr id="6" name="スライド番号プレースホルダー 5">
             <a:extLst>
               <a:ext uri="{FF2B5EF4-FFF2-40B4-BE49-F238E27FC236}">
-                <a16:creationId xmlns:a16="http://schemas.microsoft.com/office/drawing/2014/main" id="{1813E42E-DE5D-CD63-FD93-6E223FE3B34C}"/>
+                <a16:creationId xmlns:a16="http://schemas.microsoft.com/office/drawing/2014/main" id="{9977FB69-88A1-514E-5928-FA92F124CE87}"/>
               </a:ext>
             </a:extLst>
           </p:cNvPr>
@@ -541,7 +541,7 @@
           <a:bodyPr/>
           <a:lstStyle/>
           <a:p>
-            <a:fld id="{0FC57F99-FC4C-44B4-A3C7-BF624CE3CBB2}" type="slidenum">
+            <a:fld id="{35C663DD-B40A-4BAB-AE30-2DFA18315334}" type="slidenum">
               <a:rPr kumimoji="1" lang="ja-JP" altLang="en-US" smtClean="0"/>
               <a:t>‹#›</a:t>
             </a:fld>
@@ -552,7 +552,7 @@
     </p:spTree>
     <p:extLst>
       <p:ext uri="{BB962C8B-B14F-4D97-AF65-F5344CB8AC3E}">
-        <p14:creationId xmlns:p14="http://schemas.microsoft.com/office/powerpoint/2010/main" val="3786765026"/>
+        <p14:creationId xmlns:p14="http://schemas.microsoft.com/office/powerpoint/2010/main" val="2914043433"/>
       </p:ext>
     </p:extLst>
   </p:cSld>
@@ -584,7 +584,7 @@
           <p:cNvPr id="2" name="縦書きタイトル 1">
             <a:extLst>
               <a:ext uri="{FF2B5EF4-FFF2-40B4-BE49-F238E27FC236}">
-                <a16:creationId xmlns:a16="http://schemas.microsoft.com/office/drawing/2014/main" id="{F5A14391-184C-130B-0D40-01C642916834}"/>
+                <a16:creationId xmlns:a16="http://schemas.microsoft.com/office/drawing/2014/main" id="{3BD01DC4-1E8F-0756-222E-496F94A59BC8}"/>
               </a:ext>
             </a:extLst>
           </p:cNvPr>
@@ -617,7 +617,7 @@
           <p:cNvPr id="3" name="縦書きテキスト プレースホルダー 2">
             <a:extLst>
               <a:ext uri="{FF2B5EF4-FFF2-40B4-BE49-F238E27FC236}">
-                <a16:creationId xmlns:a16="http://schemas.microsoft.com/office/drawing/2014/main" id="{F50AC53E-86AD-0F03-BFEE-F56334D18EF2}"/>
+                <a16:creationId xmlns:a16="http://schemas.microsoft.com/office/drawing/2014/main" id="{01B5395B-1FE4-C36B-3729-5BD61BC4170B}"/>
               </a:ext>
             </a:extLst>
           </p:cNvPr>
@@ -711,7 +711,7 @@
           <p:cNvPr id="4" name="日付プレースホルダー 3">
             <a:extLst>
               <a:ext uri="{FF2B5EF4-FFF2-40B4-BE49-F238E27FC236}">
-                <a16:creationId xmlns:a16="http://schemas.microsoft.com/office/drawing/2014/main" id="{DCD3842D-D602-867F-B77F-E49AFEC2F636}"/>
+                <a16:creationId xmlns:a16="http://schemas.microsoft.com/office/drawing/2014/main" id="{417DB525-3C96-7133-DC72-8B835E1D8E44}"/>
               </a:ext>
             </a:extLst>
           </p:cNvPr>
@@ -727,7 +727,7 @@
           <a:bodyPr/>
           <a:lstStyle/>
           <a:p>
-            <a:fld id="{5841EDD6-1B1F-4CBA-B0EB-41010B145F50}" type="datetimeFigureOut">
+            <a:fld id="{1A4E5DBB-9B5B-477B-ACE4-ED02908BB91D}" type="datetimeFigureOut">
               <a:rPr kumimoji="1" lang="ja-JP" altLang="en-US" smtClean="0"/>
               <a:t>2026/7/30</a:t>
             </a:fld>
@@ -740,7 +740,7 @@
           <p:cNvPr id="5" name="フッター プレースホルダー 4">
             <a:extLst>
               <a:ext uri="{FF2B5EF4-FFF2-40B4-BE49-F238E27FC236}">
-                <a16:creationId xmlns:a16="http://schemas.microsoft.com/office/drawing/2014/main" id="{A46568CD-C3AD-300C-71E4-ED2226915D60}"/>
+                <a16:creationId xmlns:a16="http://schemas.microsoft.com/office/drawing/2014/main" id="{81D0F4BE-C5FF-BB24-FB78-DA60D48883EF}"/>
               </a:ext>
             </a:extLst>
           </p:cNvPr>
@@ -765,7 +765,7 @@
           <p:cNvPr id="6" name="スライド番号プレースホルダー 5">
             <a:extLst>
               <a:ext uri="{FF2B5EF4-FFF2-40B4-BE49-F238E27FC236}">
-                <a16:creationId xmlns:a16="http://schemas.microsoft.com/office/drawing/2014/main" id="{AE449E34-4CCB-741F-BBA4-B256E53908AE}"/>
+                <a16:creationId xmlns:a16="http://schemas.microsoft.com/office/drawing/2014/main" id="{1CA6D5AD-D985-AC7C-086B-95018DC453C3}"/>
               </a:ext>
             </a:extLst>
           </p:cNvPr>
@@ -781,7 +781,7 @@
           <a:bodyPr/>
           <a:lstStyle/>
           <a:p>
-            <a:fld id="{0FC57F99-FC4C-44B4-A3C7-BF624CE3CBB2}" type="slidenum">
+            <a:fld id="{35C663DD-B40A-4BAB-AE30-2DFA18315334}" type="slidenum">
               <a:rPr kumimoji="1" lang="ja-JP" altLang="en-US" smtClean="0"/>
               <a:t>‹#›</a:t>
             </a:fld>
@@ -792,7 +792,7 @@
     </p:spTree>
     <p:extLst>
       <p:ext uri="{BB962C8B-B14F-4D97-AF65-F5344CB8AC3E}">
-        <p14:creationId xmlns:p14="http://schemas.microsoft.com/office/powerpoint/2010/main" val="2269634235"/>
+        <p14:creationId xmlns:p14="http://schemas.microsoft.com/office/powerpoint/2010/main" val="1575578545"/>
       </p:ext>
     </p:extLst>
   </p:cSld>
@@ -824,7 +824,7 @@
           <p:cNvPr id="2" name="タイトル 1">
             <a:extLst>
               <a:ext uri="{FF2B5EF4-FFF2-40B4-BE49-F238E27FC236}">
-                <a16:creationId xmlns:a16="http://schemas.microsoft.com/office/drawing/2014/main" id="{FE9C8BFD-F232-AF0C-0D4B-19CF8D167E39}"/>
+                <a16:creationId xmlns:a16="http://schemas.microsoft.com/office/drawing/2014/main" id="{418C4AD6-E8F8-BCE7-539B-6E2F1CCE72EE}"/>
               </a:ext>
             </a:extLst>
           </p:cNvPr>
@@ -852,7 +852,7 @@
           <p:cNvPr id="3" name="コンテンツ プレースホルダー 2">
             <a:extLst>
               <a:ext uri="{FF2B5EF4-FFF2-40B4-BE49-F238E27FC236}">
-                <a16:creationId xmlns:a16="http://schemas.microsoft.com/office/drawing/2014/main" id="{2A1988DC-15C6-F1D1-1286-BE5C99C83CEC}"/>
+                <a16:creationId xmlns:a16="http://schemas.microsoft.com/office/drawing/2014/main" id="{1D514F13-828D-781F-ADF0-4F2E1786594F}"/>
               </a:ext>
             </a:extLst>
           </p:cNvPr>
@@ -941,7 +941,7 @@
           <p:cNvPr id="4" name="日付プレースホルダー 3">
             <a:extLst>
               <a:ext uri="{FF2B5EF4-FFF2-40B4-BE49-F238E27FC236}">
-                <a16:creationId xmlns:a16="http://schemas.microsoft.com/office/drawing/2014/main" id="{6D118508-8163-4861-478B-3DAADA3CFFB2}"/>
+                <a16:creationId xmlns:a16="http://schemas.microsoft.com/office/drawing/2014/main" id="{DE677407-E2FE-C50D-2F19-34596BA23BC2}"/>
               </a:ext>
             </a:extLst>
           </p:cNvPr>
@@ -957,7 +957,7 @@
           <a:bodyPr/>
           <a:lstStyle/>
           <a:p>
-            <a:fld id="{5841EDD6-1B1F-4CBA-B0EB-41010B145F50}" type="datetimeFigureOut">
+            <a:fld id="{1A4E5DBB-9B5B-477B-ACE4-ED02908BB91D}" type="datetimeFigureOut">
               <a:rPr kumimoji="1" lang="ja-JP" altLang="en-US" smtClean="0"/>
               <a:t>2026/7/30</a:t>
             </a:fld>
@@ -970,7 +970,7 @@
           <p:cNvPr id="5" name="フッター プレースホルダー 4">
             <a:extLst>
               <a:ext uri="{FF2B5EF4-FFF2-40B4-BE49-F238E27FC236}">
-                <a16:creationId xmlns:a16="http://schemas.microsoft.com/office/drawing/2014/main" id="{AAB9C5A4-95CA-247D-C147-7E8E6FC5927F}"/>
+                <a16:creationId xmlns:a16="http://schemas.microsoft.com/office/drawing/2014/main" id="{8374FA7F-9DE9-DE7A-62AA-625477255059}"/>
               </a:ext>
             </a:extLst>
           </p:cNvPr>
@@ -995,7 +995,7 @@
           <p:cNvPr id="6" name="スライド番号プレースホルダー 5">
             <a:extLst>
               <a:ext uri="{FF2B5EF4-FFF2-40B4-BE49-F238E27FC236}">
-                <a16:creationId xmlns:a16="http://schemas.microsoft.com/office/drawing/2014/main" id="{6EF1D6C6-D2EB-BA67-BEDA-49A243FC2FB1}"/>
+                <a16:creationId xmlns:a16="http://schemas.microsoft.com/office/drawing/2014/main" id="{97CF1FB4-7051-0C35-1C87-1919EF5D0889}"/>
               </a:ext>
             </a:extLst>
           </p:cNvPr>
@@ -1011,7 +1011,7 @@
           <a:bodyPr/>
           <a:lstStyle/>
           <a:p>
-            <a:fld id="{0FC57F99-FC4C-44B4-A3C7-BF624CE3CBB2}" type="slidenum">
+            <a:fld id="{35C663DD-B40A-4BAB-AE30-2DFA18315334}" type="slidenum">
               <a:rPr kumimoji="1" lang="ja-JP" altLang="en-US" smtClean="0"/>
               <a:t>‹#›</a:t>
             </a:fld>
@@ -1022,7 +1022,7 @@
     </p:spTree>
     <p:extLst>
       <p:ext uri="{BB962C8B-B14F-4D97-AF65-F5344CB8AC3E}">
-        <p14:creationId xmlns:p14="http://schemas.microsoft.com/office/powerpoint/2010/main" val="986501816"/>
+        <p14:creationId xmlns:p14="http://schemas.microsoft.com/office/powerpoint/2010/main" val="3203711187"/>
       </p:ext>
     </p:extLst>
   </p:cSld>
@@ -1054,7 +1054,7 @@
           <p:cNvPr id="2" name="タイトル 1">
             <a:extLst>
               <a:ext uri="{FF2B5EF4-FFF2-40B4-BE49-F238E27FC236}">
-                <a16:creationId xmlns:a16="http://schemas.microsoft.com/office/drawing/2014/main" id="{7A46B78D-B66C-4E24-0C2E-54E8E6464B43}"/>
+                <a16:creationId xmlns:a16="http://schemas.microsoft.com/office/drawing/2014/main" id="{7A8944A4-6298-5D0F-108A-29ED407C9DDE}"/>
               </a:ext>
             </a:extLst>
           </p:cNvPr>
@@ -1091,7 +1091,7 @@
           <p:cNvPr id="3" name="テキスト プレースホルダー 2">
             <a:extLst>
               <a:ext uri="{FF2B5EF4-FFF2-40B4-BE49-F238E27FC236}">
-                <a16:creationId xmlns:a16="http://schemas.microsoft.com/office/drawing/2014/main" id="{85655130-4957-F3E2-EF77-D296EDF20F7D}"/>
+                <a16:creationId xmlns:a16="http://schemas.microsoft.com/office/drawing/2014/main" id="{79240404-4B7C-FDCC-1C91-FFA896C12D51}"/>
               </a:ext>
             </a:extLst>
           </p:cNvPr>
@@ -1216,7 +1216,7 @@
           <p:cNvPr id="4" name="日付プレースホルダー 3">
             <a:extLst>
               <a:ext uri="{FF2B5EF4-FFF2-40B4-BE49-F238E27FC236}">
-                <a16:creationId xmlns:a16="http://schemas.microsoft.com/office/drawing/2014/main" id="{B2B30B37-D51B-EA3F-FDA6-4C51925A7D19}"/>
+                <a16:creationId xmlns:a16="http://schemas.microsoft.com/office/drawing/2014/main" id="{5CAD2BD5-7ED9-81DF-6D30-5C4396760A99}"/>
               </a:ext>
             </a:extLst>
           </p:cNvPr>
@@ -1232,7 +1232,7 @@
           <a:bodyPr/>
           <a:lstStyle/>
           <a:p>
-            <a:fld id="{5841EDD6-1B1F-4CBA-B0EB-41010B145F50}" type="datetimeFigureOut">
+            <a:fld id="{1A4E5DBB-9B5B-477B-ACE4-ED02908BB91D}" type="datetimeFigureOut">
               <a:rPr kumimoji="1" lang="ja-JP" altLang="en-US" smtClean="0"/>
               <a:t>2026/7/30</a:t>
             </a:fld>
@@ -1245,7 +1245,7 @@
           <p:cNvPr id="5" name="フッター プレースホルダー 4">
             <a:extLst>
               <a:ext uri="{FF2B5EF4-FFF2-40B4-BE49-F238E27FC236}">
-                <a16:creationId xmlns:a16="http://schemas.microsoft.com/office/drawing/2014/main" id="{80DBAC45-D724-35AB-0FD2-47290536484D}"/>
+                <a16:creationId xmlns:a16="http://schemas.microsoft.com/office/drawing/2014/main" id="{9FE9931D-CB09-F615-7086-75A7642B4B64}"/>
               </a:ext>
             </a:extLst>
           </p:cNvPr>
@@ -1270,7 +1270,7 @@
           <p:cNvPr id="6" name="スライド番号プレースホルダー 5">
             <a:extLst>
               <a:ext uri="{FF2B5EF4-FFF2-40B4-BE49-F238E27FC236}">
-                <a16:creationId xmlns:a16="http://schemas.microsoft.com/office/drawing/2014/main" id="{AC8F29FD-DC65-6F8D-56BD-8733338816A9}"/>
+                <a16:creationId xmlns:a16="http://schemas.microsoft.com/office/drawing/2014/main" id="{E26D80E5-BC93-EB85-7CEB-43CB896A5291}"/>
               </a:ext>
             </a:extLst>
           </p:cNvPr>
@@ -1286,7 +1286,7 @@
           <a:bodyPr/>
           <a:lstStyle/>
           <a:p>
-            <a:fld id="{0FC57F99-FC4C-44B4-A3C7-BF624CE3CBB2}" type="slidenum">
+            <a:fld id="{35C663DD-B40A-4BAB-AE30-2DFA18315334}" type="slidenum">
               <a:rPr kumimoji="1" lang="ja-JP" altLang="en-US" smtClean="0"/>
               <a:t>‹#›</a:t>
             </a:fld>
@@ -1297,7 +1297,7 @@
     </p:spTree>
     <p:extLst>
       <p:ext uri="{BB962C8B-B14F-4D97-AF65-F5344CB8AC3E}">
-        <p14:creationId xmlns:p14="http://schemas.microsoft.com/office/powerpoint/2010/main" val="4147171929"/>
+        <p14:creationId xmlns:p14="http://schemas.microsoft.com/office/powerpoint/2010/main" val="1457417363"/>
       </p:ext>
     </p:extLst>
   </p:cSld>
@@ -1329,7 +1329,7 @@
           <p:cNvPr id="2" name="タイトル 1">
             <a:extLst>
               <a:ext uri="{FF2B5EF4-FFF2-40B4-BE49-F238E27FC236}">
-                <a16:creationId xmlns:a16="http://schemas.microsoft.com/office/drawing/2014/main" id="{8BCA4633-0865-80F6-50FC-BA9821EFB79E}"/>
+                <a16:creationId xmlns:a16="http://schemas.microsoft.com/office/drawing/2014/main" id="{CEFAE501-CD21-98C1-0A06-5170804F6089}"/>
               </a:ext>
             </a:extLst>
           </p:cNvPr>
@@ -1357,7 +1357,7 @@
           <p:cNvPr id="3" name="コンテンツ プレースホルダー 2">
             <a:extLst>
               <a:ext uri="{FF2B5EF4-FFF2-40B4-BE49-F238E27FC236}">
-                <a16:creationId xmlns:a16="http://schemas.microsoft.com/office/drawing/2014/main" id="{1F455514-136E-8DD7-E1B7-F7696D45647F}"/>
+                <a16:creationId xmlns:a16="http://schemas.microsoft.com/office/drawing/2014/main" id="{54EC43A0-9713-EBEE-E3A7-AAFE7BA8DCE3}"/>
               </a:ext>
             </a:extLst>
           </p:cNvPr>
@@ -1451,7 +1451,7 @@
           <p:cNvPr id="4" name="コンテンツ プレースホルダー 3">
             <a:extLst>
               <a:ext uri="{FF2B5EF4-FFF2-40B4-BE49-F238E27FC236}">
-                <a16:creationId xmlns:a16="http://schemas.microsoft.com/office/drawing/2014/main" id="{6BA3EA51-8DD5-C9B9-D680-91A6FA18E5EE}"/>
+                <a16:creationId xmlns:a16="http://schemas.microsoft.com/office/drawing/2014/main" id="{9CA03037-8424-7F4A-00F5-797E774AE783}"/>
               </a:ext>
             </a:extLst>
           </p:cNvPr>
@@ -1545,7 +1545,7 @@
           <p:cNvPr id="5" name="日付プレースホルダー 4">
             <a:extLst>
               <a:ext uri="{FF2B5EF4-FFF2-40B4-BE49-F238E27FC236}">
-                <a16:creationId xmlns:a16="http://schemas.microsoft.com/office/drawing/2014/main" id="{9816C0CE-69DD-5900-6B68-229D8AFC10D8}"/>
+                <a16:creationId xmlns:a16="http://schemas.microsoft.com/office/drawing/2014/main" id="{BBB6DA38-E1BF-3956-FF14-5AD3AB6B19DA}"/>
               </a:ext>
             </a:extLst>
           </p:cNvPr>
@@ -1561,7 +1561,7 @@
           <a:bodyPr/>
           <a:lstStyle/>
           <a:p>
-            <a:fld id="{5841EDD6-1B1F-4CBA-B0EB-41010B145F50}" type="datetimeFigureOut">
+            <a:fld id="{1A4E5DBB-9B5B-477B-ACE4-ED02908BB91D}" type="datetimeFigureOut">
               <a:rPr kumimoji="1" lang="ja-JP" altLang="en-US" smtClean="0"/>
               <a:t>2026/7/30</a:t>
             </a:fld>
@@ -1574,7 +1574,7 @@
           <p:cNvPr id="6" name="フッター プレースホルダー 5">
             <a:extLst>
               <a:ext uri="{FF2B5EF4-FFF2-40B4-BE49-F238E27FC236}">
-                <a16:creationId xmlns:a16="http://schemas.microsoft.com/office/drawing/2014/main" id="{1F87660D-52D1-89B9-DD5F-F7FDF9EC00A4}"/>
+                <a16:creationId xmlns:a16="http://schemas.microsoft.com/office/drawing/2014/main" id="{904BF2EE-EFBD-3DB7-3FF5-DD2AEB46F8D6}"/>
               </a:ext>
             </a:extLst>
           </p:cNvPr>
@@ -1599,7 +1599,7 @@
           <p:cNvPr id="7" name="スライド番号プレースホルダー 6">
             <a:extLst>
               <a:ext uri="{FF2B5EF4-FFF2-40B4-BE49-F238E27FC236}">
-                <a16:creationId xmlns:a16="http://schemas.microsoft.com/office/drawing/2014/main" id="{ECFCB0A0-E65E-A352-DF56-5864F0F1FB60}"/>
+                <a16:creationId xmlns:a16="http://schemas.microsoft.com/office/drawing/2014/main" id="{07D122E3-E976-AD48-A1C6-9857D7DF627D}"/>
               </a:ext>
             </a:extLst>
           </p:cNvPr>
@@ -1615,7 +1615,7 @@
           <a:bodyPr/>
           <a:lstStyle/>
           <a:p>
-            <a:fld id="{0FC57F99-FC4C-44B4-A3C7-BF624CE3CBB2}" type="slidenum">
+            <a:fld id="{35C663DD-B40A-4BAB-AE30-2DFA18315334}" type="slidenum">
               <a:rPr kumimoji="1" lang="ja-JP" altLang="en-US" smtClean="0"/>
               <a:t>‹#›</a:t>
             </a:fld>
@@ -1626,7 +1626,7 @@
     </p:spTree>
     <p:extLst>
       <p:ext uri="{BB962C8B-B14F-4D97-AF65-F5344CB8AC3E}">
-        <p14:creationId xmlns:p14="http://schemas.microsoft.com/office/powerpoint/2010/main" val="208796145"/>
+        <p14:creationId xmlns:p14="http://schemas.microsoft.com/office/powerpoint/2010/main" val="536422274"/>
       </p:ext>
     </p:extLst>
   </p:cSld>
@@ -1658,7 +1658,7 @@
           <p:cNvPr id="2" name="タイトル 1">
             <a:extLst>
               <a:ext uri="{FF2B5EF4-FFF2-40B4-BE49-F238E27FC236}">
-                <a16:creationId xmlns:a16="http://schemas.microsoft.com/office/drawing/2014/main" id="{9D18F018-F622-1A13-D50A-BD9A94C3684B}"/>
+                <a16:creationId xmlns:a16="http://schemas.microsoft.com/office/drawing/2014/main" id="{2E0F687A-C15D-5595-3EE8-4A640CBB4A8F}"/>
               </a:ext>
             </a:extLst>
           </p:cNvPr>
@@ -1691,7 +1691,7 @@
           <p:cNvPr id="3" name="テキスト プレースホルダー 2">
             <a:extLst>
               <a:ext uri="{FF2B5EF4-FFF2-40B4-BE49-F238E27FC236}">
-                <a16:creationId xmlns:a16="http://schemas.microsoft.com/office/drawing/2014/main" id="{07ADA96A-CF7A-7D14-3F07-27FD325DD34B}"/>
+                <a16:creationId xmlns:a16="http://schemas.microsoft.com/office/drawing/2014/main" id="{CFE3FD65-67BA-8B74-9C33-1EC4A83F3944}"/>
               </a:ext>
             </a:extLst>
           </p:cNvPr>
@@ -1762,7 +1762,7 @@
           <p:cNvPr id="4" name="コンテンツ プレースホルダー 3">
             <a:extLst>
               <a:ext uri="{FF2B5EF4-FFF2-40B4-BE49-F238E27FC236}">
-                <a16:creationId xmlns:a16="http://schemas.microsoft.com/office/drawing/2014/main" id="{7451ED40-7F79-CBE4-D929-C6A7B70563A0}"/>
+                <a16:creationId xmlns:a16="http://schemas.microsoft.com/office/drawing/2014/main" id="{2B50A2EB-AA3B-A280-ED45-8D27386FC0BB}"/>
               </a:ext>
             </a:extLst>
           </p:cNvPr>
@@ -1856,7 +1856,7 @@
           <p:cNvPr id="5" name="テキスト プレースホルダー 4">
             <a:extLst>
               <a:ext uri="{FF2B5EF4-FFF2-40B4-BE49-F238E27FC236}">
-                <a16:creationId xmlns:a16="http://schemas.microsoft.com/office/drawing/2014/main" id="{25A79E2D-B6D0-C69D-0BAE-33CC29CE13A6}"/>
+                <a16:creationId xmlns:a16="http://schemas.microsoft.com/office/drawing/2014/main" id="{4C8B362E-ECA6-D264-C1EF-785A62FC99EA}"/>
               </a:ext>
             </a:extLst>
           </p:cNvPr>
@@ -1927,7 +1927,7 @@
           <p:cNvPr id="6" name="コンテンツ プレースホルダー 5">
             <a:extLst>
               <a:ext uri="{FF2B5EF4-FFF2-40B4-BE49-F238E27FC236}">
-                <a16:creationId xmlns:a16="http://schemas.microsoft.com/office/drawing/2014/main" id="{D80BAEC4-EE13-2F88-F034-4E9201D59318}"/>
+                <a16:creationId xmlns:a16="http://schemas.microsoft.com/office/drawing/2014/main" id="{792E8369-3B9B-7B9E-C975-5E5B1DF7C702}"/>
               </a:ext>
             </a:extLst>
           </p:cNvPr>
@@ -2021,7 +2021,7 @@
           <p:cNvPr id="7" name="日付プレースホルダー 6">
             <a:extLst>
               <a:ext uri="{FF2B5EF4-FFF2-40B4-BE49-F238E27FC236}">
-                <a16:creationId xmlns:a16="http://schemas.microsoft.com/office/drawing/2014/main" id="{05ED3A89-232A-FC6E-2847-4249559BD10C}"/>
+                <a16:creationId xmlns:a16="http://schemas.microsoft.com/office/drawing/2014/main" id="{9A16CD1C-12AC-79F0-B657-B900B9E2741F}"/>
               </a:ext>
             </a:extLst>
           </p:cNvPr>
@@ -2037,7 +2037,7 @@
           <a:bodyPr/>
           <a:lstStyle/>
           <a:p>
-            <a:fld id="{5841EDD6-1B1F-4CBA-B0EB-41010B145F50}" type="datetimeFigureOut">
+            <a:fld id="{1A4E5DBB-9B5B-477B-ACE4-ED02908BB91D}" type="datetimeFigureOut">
               <a:rPr kumimoji="1" lang="ja-JP" altLang="en-US" smtClean="0"/>
               <a:t>2026/7/30</a:t>
             </a:fld>
@@ -2050,7 +2050,7 @@
           <p:cNvPr id="8" name="フッター プレースホルダー 7">
             <a:extLst>
               <a:ext uri="{FF2B5EF4-FFF2-40B4-BE49-F238E27FC236}">
-                <a16:creationId xmlns:a16="http://schemas.microsoft.com/office/drawing/2014/main" id="{80FFFE01-D5B9-A7B6-3CB0-71B071C07281}"/>
+                <a16:creationId xmlns:a16="http://schemas.microsoft.com/office/drawing/2014/main" id="{99944EC1-D850-5F37-F87F-917A47CE9378}"/>
               </a:ext>
             </a:extLst>
           </p:cNvPr>
@@ -2075,7 +2075,7 @@
           <p:cNvPr id="9" name="スライド番号プレースホルダー 8">
             <a:extLst>
               <a:ext uri="{FF2B5EF4-FFF2-40B4-BE49-F238E27FC236}">
-                <a16:creationId xmlns:a16="http://schemas.microsoft.com/office/drawing/2014/main" id="{24B96FA6-57F0-D12C-5079-68370F5783F2}"/>
+                <a16:creationId xmlns:a16="http://schemas.microsoft.com/office/drawing/2014/main" id="{DAAD559E-694B-7CAD-6087-924045E0E900}"/>
               </a:ext>
             </a:extLst>
           </p:cNvPr>
@@ -2091,7 +2091,7 @@
           <a:bodyPr/>
           <a:lstStyle/>
           <a:p>
-            <a:fld id="{0FC57F99-FC4C-44B4-A3C7-BF624CE3CBB2}" type="slidenum">
+            <a:fld id="{35C663DD-B40A-4BAB-AE30-2DFA18315334}" type="slidenum">
               <a:rPr kumimoji="1" lang="ja-JP" altLang="en-US" smtClean="0"/>
               <a:t>‹#›</a:t>
             </a:fld>
@@ -2102,7 +2102,7 @@
     </p:spTree>
     <p:extLst>
       <p:ext uri="{BB962C8B-B14F-4D97-AF65-F5344CB8AC3E}">
-        <p14:creationId xmlns:p14="http://schemas.microsoft.com/office/powerpoint/2010/main" val="2517937820"/>
+        <p14:creationId xmlns:p14="http://schemas.microsoft.com/office/powerpoint/2010/main" val="2680973068"/>
       </p:ext>
     </p:extLst>
   </p:cSld>
@@ -2134,7 +2134,7 @@
           <p:cNvPr id="2" name="タイトル 1">
             <a:extLst>
               <a:ext uri="{FF2B5EF4-FFF2-40B4-BE49-F238E27FC236}">
-                <a16:creationId xmlns:a16="http://schemas.microsoft.com/office/drawing/2014/main" id="{8D7D532A-A9F3-18A2-3957-E3C296BDAED0}"/>
+                <a16:creationId xmlns:a16="http://schemas.microsoft.com/office/drawing/2014/main" id="{30432404-3196-4D31-5EA3-D44A71CDE262}"/>
               </a:ext>
             </a:extLst>
           </p:cNvPr>
@@ -2162,7 +2162,7 @@
           <p:cNvPr id="3" name="日付プレースホルダー 2">
             <a:extLst>
               <a:ext uri="{FF2B5EF4-FFF2-40B4-BE49-F238E27FC236}">
-                <a16:creationId xmlns:a16="http://schemas.microsoft.com/office/drawing/2014/main" id="{68307C6D-3C9A-A1B0-A9AD-11F1992BA87F}"/>
+                <a16:creationId xmlns:a16="http://schemas.microsoft.com/office/drawing/2014/main" id="{15CF5DA7-F849-D42F-77CF-422E18103C00}"/>
               </a:ext>
             </a:extLst>
           </p:cNvPr>
@@ -2178,7 +2178,7 @@
           <a:bodyPr/>
           <a:lstStyle/>
           <a:p>
-            <a:fld id="{5841EDD6-1B1F-4CBA-B0EB-41010B145F50}" type="datetimeFigureOut">
+            <a:fld id="{1A4E5DBB-9B5B-477B-ACE4-ED02908BB91D}" type="datetimeFigureOut">
               <a:rPr kumimoji="1" lang="ja-JP" altLang="en-US" smtClean="0"/>
               <a:t>2026/7/30</a:t>
             </a:fld>
@@ -2191,7 +2191,7 @@
           <p:cNvPr id="4" name="フッター プレースホルダー 3">
             <a:extLst>
               <a:ext uri="{FF2B5EF4-FFF2-40B4-BE49-F238E27FC236}">
-                <a16:creationId xmlns:a16="http://schemas.microsoft.com/office/drawing/2014/main" id="{F8FC22FC-10AE-39E6-43DD-E4DDD5871B6E}"/>
+                <a16:creationId xmlns:a16="http://schemas.microsoft.com/office/drawing/2014/main" id="{B5E10E14-6508-557C-8B4A-3E8711CDF9E2}"/>
               </a:ext>
             </a:extLst>
           </p:cNvPr>
@@ -2216,7 +2216,7 @@
           <p:cNvPr id="5" name="スライド番号プレースホルダー 4">
             <a:extLst>
               <a:ext uri="{FF2B5EF4-FFF2-40B4-BE49-F238E27FC236}">
-                <a16:creationId xmlns:a16="http://schemas.microsoft.com/office/drawing/2014/main" id="{83545D05-FD4B-DEF0-6A69-D3E34130EB55}"/>
+                <a16:creationId xmlns:a16="http://schemas.microsoft.com/office/drawing/2014/main" id="{DC549F92-E0CB-25B7-B366-04C53A5EBC6E}"/>
               </a:ext>
             </a:extLst>
           </p:cNvPr>
@@ -2232,7 +2232,7 @@
           <a:bodyPr/>
           <a:lstStyle/>
           <a:p>
-            <a:fld id="{0FC57F99-FC4C-44B4-A3C7-BF624CE3CBB2}" type="slidenum">
+            <a:fld id="{35C663DD-B40A-4BAB-AE30-2DFA18315334}" type="slidenum">
               <a:rPr kumimoji="1" lang="ja-JP" altLang="en-US" smtClean="0"/>
               <a:t>‹#›</a:t>
             </a:fld>
@@ -2243,7 +2243,7 @@
     </p:spTree>
     <p:extLst>
       <p:ext uri="{BB962C8B-B14F-4D97-AF65-F5344CB8AC3E}">
-        <p14:creationId xmlns:p14="http://schemas.microsoft.com/office/powerpoint/2010/main" val="1308458974"/>
+        <p14:creationId xmlns:p14="http://schemas.microsoft.com/office/powerpoint/2010/main" val="3993465823"/>
       </p:ext>
     </p:extLst>
   </p:cSld>
@@ -2275,7 +2275,7 @@
           <p:cNvPr id="2" name="日付プレースホルダー 1">
             <a:extLst>
               <a:ext uri="{FF2B5EF4-FFF2-40B4-BE49-F238E27FC236}">
-                <a16:creationId xmlns:a16="http://schemas.microsoft.com/office/drawing/2014/main" id="{A60FD9FB-01F3-17C3-767C-55CFCC9042EE}"/>
+                <a16:creationId xmlns:a16="http://schemas.microsoft.com/office/drawing/2014/main" id="{25F73E72-17D4-8D1A-C381-BDD62B605B84}"/>
               </a:ext>
             </a:extLst>
           </p:cNvPr>
@@ -2291,7 +2291,7 @@
           <a:bodyPr/>
           <a:lstStyle/>
           <a:p>
-            <a:fld id="{5841EDD6-1B1F-4CBA-B0EB-41010B145F50}" type="datetimeFigureOut">
+            <a:fld id="{1A4E5DBB-9B5B-477B-ACE4-ED02908BB91D}" type="datetimeFigureOut">
               <a:rPr kumimoji="1" lang="ja-JP" altLang="en-US" smtClean="0"/>
               <a:t>2026/7/30</a:t>
             </a:fld>
@@ -2304,7 +2304,7 @@
           <p:cNvPr id="3" name="フッター プレースホルダー 2">
             <a:extLst>
               <a:ext uri="{FF2B5EF4-FFF2-40B4-BE49-F238E27FC236}">
-                <a16:creationId xmlns:a16="http://schemas.microsoft.com/office/drawing/2014/main" id="{64FCCBAA-0B00-FD25-853F-795998851A2A}"/>
+                <a16:creationId xmlns:a16="http://schemas.microsoft.com/office/drawing/2014/main" id="{975E6F89-DEF4-831B-C273-9059623A5707}"/>
               </a:ext>
             </a:extLst>
           </p:cNvPr>
@@ -2329,7 +2329,7 @@
           <p:cNvPr id="4" name="スライド番号プレースホルダー 3">
             <a:extLst>
               <a:ext uri="{FF2B5EF4-FFF2-40B4-BE49-F238E27FC236}">
-                <a16:creationId xmlns:a16="http://schemas.microsoft.com/office/drawing/2014/main" id="{1DE8B20F-18DE-1C5C-848E-D7DE440FEF92}"/>
+                <a16:creationId xmlns:a16="http://schemas.microsoft.com/office/drawing/2014/main" id="{E71ED182-2FF7-BE66-9040-22DDF4F2002F}"/>
               </a:ext>
             </a:extLst>
           </p:cNvPr>
@@ -2345,7 +2345,7 @@
           <a:bodyPr/>
           <a:lstStyle/>
           <a:p>
-            <a:fld id="{0FC57F99-FC4C-44B4-A3C7-BF624CE3CBB2}" type="slidenum">
+            <a:fld id="{35C663DD-B40A-4BAB-AE30-2DFA18315334}" type="slidenum">
               <a:rPr kumimoji="1" lang="ja-JP" altLang="en-US" smtClean="0"/>
               <a:t>‹#›</a:t>
             </a:fld>
@@ -2356,7 +2356,7 @@
     </p:spTree>
     <p:extLst>
       <p:ext uri="{BB962C8B-B14F-4D97-AF65-F5344CB8AC3E}">
-        <p14:creationId xmlns:p14="http://schemas.microsoft.com/office/powerpoint/2010/main" val="3577545038"/>
+        <p14:creationId xmlns:p14="http://schemas.microsoft.com/office/powerpoint/2010/main" val="3148941606"/>
       </p:ext>
     </p:extLst>
   </p:cSld>
@@ -2388,7 +2388,7 @@
           <p:cNvPr id="2" name="タイトル 1">
             <a:extLst>
               <a:ext uri="{FF2B5EF4-FFF2-40B4-BE49-F238E27FC236}">
-                <a16:creationId xmlns:a16="http://schemas.microsoft.com/office/drawing/2014/main" id="{B26C40F0-EDD5-AD3F-DEBF-5F453F53ED31}"/>
+                <a16:creationId xmlns:a16="http://schemas.microsoft.com/office/drawing/2014/main" id="{E6217A7D-B7B5-8804-A655-A953D4F641DF}"/>
               </a:ext>
             </a:extLst>
           </p:cNvPr>
@@ -2425,7 +2425,7 @@
           <p:cNvPr id="3" name="コンテンツ プレースホルダー 2">
             <a:extLst>
               <a:ext uri="{FF2B5EF4-FFF2-40B4-BE49-F238E27FC236}">
-                <a16:creationId xmlns:a16="http://schemas.microsoft.com/office/drawing/2014/main" id="{7CC0A4A5-CC2C-8CCC-CB89-A7D78BA9F46B}"/>
+                <a16:creationId xmlns:a16="http://schemas.microsoft.com/office/drawing/2014/main" id="{89B07FFF-BE4B-F366-7FC7-C4796CABC41D}"/>
               </a:ext>
             </a:extLst>
           </p:cNvPr>
@@ -2547,7 +2547,7 @@
           <p:cNvPr id="4" name="テキスト プレースホルダー 3">
             <a:extLst>
               <a:ext uri="{FF2B5EF4-FFF2-40B4-BE49-F238E27FC236}">
-                <a16:creationId xmlns:a16="http://schemas.microsoft.com/office/drawing/2014/main" id="{710EE30C-61B3-D76E-DDA4-8E902617D3E2}"/>
+                <a16:creationId xmlns:a16="http://schemas.microsoft.com/office/drawing/2014/main" id="{95846320-6D36-BD6E-F744-6FC2B1A2EE95}"/>
               </a:ext>
             </a:extLst>
           </p:cNvPr>
@@ -2618,7 +2618,7 @@
           <p:cNvPr id="5" name="日付プレースホルダー 4">
             <a:extLst>
               <a:ext uri="{FF2B5EF4-FFF2-40B4-BE49-F238E27FC236}">
-                <a16:creationId xmlns:a16="http://schemas.microsoft.com/office/drawing/2014/main" id="{46AA9DD3-33F8-35DB-4A8A-B3519900A6FD}"/>
+                <a16:creationId xmlns:a16="http://schemas.microsoft.com/office/drawing/2014/main" id="{359BA0B3-E41D-C24B-F053-E69E0670E28F}"/>
               </a:ext>
             </a:extLst>
           </p:cNvPr>
@@ -2634,7 +2634,7 @@
           <a:bodyPr/>
           <a:lstStyle/>
           <a:p>
-            <a:fld id="{5841EDD6-1B1F-4CBA-B0EB-41010B145F50}" type="datetimeFigureOut">
+            <a:fld id="{1A4E5DBB-9B5B-477B-ACE4-ED02908BB91D}" type="datetimeFigureOut">
               <a:rPr kumimoji="1" lang="ja-JP" altLang="en-US" smtClean="0"/>
               <a:t>2026/7/30</a:t>
             </a:fld>
@@ -2647,7 +2647,7 @@
           <p:cNvPr id="6" name="フッター プレースホルダー 5">
             <a:extLst>
               <a:ext uri="{FF2B5EF4-FFF2-40B4-BE49-F238E27FC236}">
-                <a16:creationId xmlns:a16="http://schemas.microsoft.com/office/drawing/2014/main" id="{61D1B238-F863-E258-E2F2-E790FF0FBB51}"/>
+                <a16:creationId xmlns:a16="http://schemas.microsoft.com/office/drawing/2014/main" id="{272F49F1-6D0E-B34D-31DC-20009C65904A}"/>
               </a:ext>
             </a:extLst>
           </p:cNvPr>
@@ -2672,7 +2672,7 @@
           <p:cNvPr id="7" name="スライド番号プレースホルダー 6">
             <a:extLst>
               <a:ext uri="{FF2B5EF4-FFF2-40B4-BE49-F238E27FC236}">
-                <a16:creationId xmlns:a16="http://schemas.microsoft.com/office/drawing/2014/main" id="{0B0EE8D5-E98E-E9B3-FD12-3FA7611EEB7F}"/>
+                <a16:creationId xmlns:a16="http://schemas.microsoft.com/office/drawing/2014/main" id="{9BEB2718-96AE-6330-12FB-42455A44FFB8}"/>
               </a:ext>
             </a:extLst>
           </p:cNvPr>
@@ -2688,7 +2688,7 @@
           <a:bodyPr/>
           <a:lstStyle/>
           <a:p>
-            <a:fld id="{0FC57F99-FC4C-44B4-A3C7-BF624CE3CBB2}" type="slidenum">
+            <a:fld id="{35C663DD-B40A-4BAB-AE30-2DFA18315334}" type="slidenum">
               <a:rPr kumimoji="1" lang="ja-JP" altLang="en-US" smtClean="0"/>
               <a:t>‹#›</a:t>
             </a:fld>
@@ -2699,7 +2699,7 @@
     </p:spTree>
     <p:extLst>
       <p:ext uri="{BB962C8B-B14F-4D97-AF65-F5344CB8AC3E}">
-        <p14:creationId xmlns:p14="http://schemas.microsoft.com/office/powerpoint/2010/main" val="2149450785"/>
+        <p14:creationId xmlns:p14="http://schemas.microsoft.com/office/powerpoint/2010/main" val="3417497658"/>
       </p:ext>
     </p:extLst>
   </p:cSld>
@@ -2731,7 +2731,7 @@
           <p:cNvPr id="2" name="タイトル 1">
             <a:extLst>
               <a:ext uri="{FF2B5EF4-FFF2-40B4-BE49-F238E27FC236}">
-                <a16:creationId xmlns:a16="http://schemas.microsoft.com/office/drawing/2014/main" id="{CC807478-B876-48EB-2135-740BBF984ACA}"/>
+                <a16:creationId xmlns:a16="http://schemas.microsoft.com/office/drawing/2014/main" id="{66BEFB11-F385-75EF-4A23-EA7BC028171D}"/>
               </a:ext>
             </a:extLst>
           </p:cNvPr>
@@ -2768,7 +2768,7 @@
           <p:cNvPr id="3" name="図プレースホルダー 2">
             <a:extLst>
               <a:ext uri="{FF2B5EF4-FFF2-40B4-BE49-F238E27FC236}">
-                <a16:creationId xmlns:a16="http://schemas.microsoft.com/office/drawing/2014/main" id="{886EDCEE-4270-E5FD-E232-841412B698AD}"/>
+                <a16:creationId xmlns:a16="http://schemas.microsoft.com/office/drawing/2014/main" id="{9ECC5BDB-98FE-7285-BA99-13A8F0E58BAA}"/>
               </a:ext>
             </a:extLst>
           </p:cNvPr>
@@ -2835,7 +2835,7 @@
           <p:cNvPr id="4" name="テキスト プレースホルダー 3">
             <a:extLst>
               <a:ext uri="{FF2B5EF4-FFF2-40B4-BE49-F238E27FC236}">
-                <a16:creationId xmlns:a16="http://schemas.microsoft.com/office/drawing/2014/main" id="{0D0DCFB0-2987-7A7F-4DEA-8CCFBBBBF5BC}"/>
+                <a16:creationId xmlns:a16="http://schemas.microsoft.com/office/drawing/2014/main" id="{B42B59CF-9FE8-74D3-738D-2F471B8E86AE}"/>
               </a:ext>
             </a:extLst>
           </p:cNvPr>
@@ -2906,7 +2906,7 @@
           <p:cNvPr id="5" name="日付プレースホルダー 4">
             <a:extLst>
               <a:ext uri="{FF2B5EF4-FFF2-40B4-BE49-F238E27FC236}">
-                <a16:creationId xmlns:a16="http://schemas.microsoft.com/office/drawing/2014/main" id="{56FCE48D-D27F-3797-E1BC-FAB50293F9FD}"/>
+                <a16:creationId xmlns:a16="http://schemas.microsoft.com/office/drawing/2014/main" id="{FA1C6D6C-EA73-DD34-0379-F75D12FFDD93}"/>
               </a:ext>
             </a:extLst>
           </p:cNvPr>
@@ -2922,7 +2922,7 @@
           <a:bodyPr/>
           <a:lstStyle/>
           <a:p>
-            <a:fld id="{5841EDD6-1B1F-4CBA-B0EB-41010B145F50}" type="datetimeFigureOut">
+            <a:fld id="{1A4E5DBB-9B5B-477B-ACE4-ED02908BB91D}" type="datetimeFigureOut">
               <a:rPr kumimoji="1" lang="ja-JP" altLang="en-US" smtClean="0"/>
               <a:t>2026/7/30</a:t>
             </a:fld>
@@ -2935,7 +2935,7 @@
           <p:cNvPr id="6" name="フッター プレースホルダー 5">
             <a:extLst>
               <a:ext uri="{FF2B5EF4-FFF2-40B4-BE49-F238E27FC236}">
-                <a16:creationId xmlns:a16="http://schemas.microsoft.com/office/drawing/2014/main" id="{831E758D-2E9D-1EED-8361-8D5AEFA57F89}"/>
+                <a16:creationId xmlns:a16="http://schemas.microsoft.com/office/drawing/2014/main" id="{25522934-F2F3-B465-5D9B-222BD97500F7}"/>
               </a:ext>
             </a:extLst>
           </p:cNvPr>
@@ -2960,7 +2960,7 @@
           <p:cNvPr id="7" name="スライド番号プレースホルダー 6">
             <a:extLst>
               <a:ext uri="{FF2B5EF4-FFF2-40B4-BE49-F238E27FC236}">
-                <a16:creationId xmlns:a16="http://schemas.microsoft.com/office/drawing/2014/main" id="{FB1BB7F5-BEE2-0EE9-8082-D3964884B9BF}"/>
+                <a16:creationId xmlns:a16="http://schemas.microsoft.com/office/drawing/2014/main" id="{F2329AE8-AD8E-ED77-20EF-2DF261A4BC7A}"/>
               </a:ext>
             </a:extLst>
           </p:cNvPr>
@@ -2976,7 +2976,7 @@
           <a:bodyPr/>
           <a:lstStyle/>
           <a:p>
-            <a:fld id="{0FC57F99-FC4C-44B4-A3C7-BF624CE3CBB2}" type="slidenum">
+            <a:fld id="{35C663DD-B40A-4BAB-AE30-2DFA18315334}" type="slidenum">
               <a:rPr kumimoji="1" lang="ja-JP" altLang="en-US" smtClean="0"/>
               <a:t>‹#›</a:t>
             </a:fld>
@@ -2987,7 +2987,7 @@
     </p:spTree>
     <p:extLst>
       <p:ext uri="{BB962C8B-B14F-4D97-AF65-F5344CB8AC3E}">
-        <p14:creationId xmlns:p14="http://schemas.microsoft.com/office/powerpoint/2010/main" val="496041020"/>
+        <p14:creationId xmlns:p14="http://schemas.microsoft.com/office/powerpoint/2010/main" val="1910533504"/>
       </p:ext>
     </p:extLst>
   </p:cSld>
@@ -3024,7 +3024,7 @@
           <p:cNvPr id="2" name="タイトル プレースホルダー 1">
             <a:extLst>
               <a:ext uri="{FF2B5EF4-FFF2-40B4-BE49-F238E27FC236}">
-                <a16:creationId xmlns:a16="http://schemas.microsoft.com/office/drawing/2014/main" id="{0052E1F4-3FB5-E630-E270-0B5738FE6FAB}"/>
+                <a16:creationId xmlns:a16="http://schemas.microsoft.com/office/drawing/2014/main" id="{0467B6BA-EAEE-E9A1-77CD-CA0105B08D3C}"/>
               </a:ext>
             </a:extLst>
           </p:cNvPr>
@@ -3062,7 +3062,7 @@
           <p:cNvPr id="3" name="テキスト プレースホルダー 2">
             <a:extLst>
               <a:ext uri="{FF2B5EF4-FFF2-40B4-BE49-F238E27FC236}">
-                <a16:creationId xmlns:a16="http://schemas.microsoft.com/office/drawing/2014/main" id="{CD09FA49-6500-0514-35B6-BEE1664157B2}"/>
+                <a16:creationId xmlns:a16="http://schemas.microsoft.com/office/drawing/2014/main" id="{855EA252-5B14-5B2F-4F9F-37FB9D076949}"/>
               </a:ext>
             </a:extLst>
           </p:cNvPr>
@@ -3161,7 +3161,7 @@
           <p:cNvPr id="4" name="日付プレースホルダー 3">
             <a:extLst>
               <a:ext uri="{FF2B5EF4-FFF2-40B4-BE49-F238E27FC236}">
-                <a16:creationId xmlns:a16="http://schemas.microsoft.com/office/drawing/2014/main" id="{60B0E0D7-E4E8-2170-95A4-E2112ED41C5C}"/>
+                <a16:creationId xmlns:a16="http://schemas.microsoft.com/office/drawing/2014/main" id="{53DBAB57-98D1-9CE2-0216-0C144B8BAE33}"/>
               </a:ext>
             </a:extLst>
           </p:cNvPr>
@@ -3195,7 +3195,7 @@
             </a:lvl1pPr>
           </a:lstStyle>
           <a:p>
-            <a:fld id="{5841EDD6-1B1F-4CBA-B0EB-41010B145F50}" type="datetimeFigureOut">
+            <a:fld id="{1A4E5DBB-9B5B-477B-ACE4-ED02908BB91D}" type="datetimeFigureOut">
               <a:rPr kumimoji="1" lang="ja-JP" altLang="en-US" smtClean="0"/>
               <a:t>2026/7/30</a:t>
             </a:fld>
@@ -3208,7 +3208,7 @@
           <p:cNvPr id="5" name="フッター プレースホルダー 4">
             <a:extLst>
               <a:ext uri="{FF2B5EF4-FFF2-40B4-BE49-F238E27FC236}">
-                <a16:creationId xmlns:a16="http://schemas.microsoft.com/office/drawing/2014/main" id="{DA4DFD80-88E0-2A8F-3BF5-025560295B11}"/>
+                <a16:creationId xmlns:a16="http://schemas.microsoft.com/office/drawing/2014/main" id="{343EB44A-73FD-753A-AC5B-611065ECD917}"/>
               </a:ext>
             </a:extLst>
           </p:cNvPr>
@@ -3251,7 +3251,7 @@
           <p:cNvPr id="6" name="スライド番号プレースホルダー 5">
             <a:extLst>
               <a:ext uri="{FF2B5EF4-FFF2-40B4-BE49-F238E27FC236}">
-                <a16:creationId xmlns:a16="http://schemas.microsoft.com/office/drawing/2014/main" id="{E0626E30-2517-E4DE-01AD-6ABB37DC3C4D}"/>
+                <a16:creationId xmlns:a16="http://schemas.microsoft.com/office/drawing/2014/main" id="{60B2B4BB-1DB1-AFE4-AD95-E6586D42B7EE}"/>
               </a:ext>
             </a:extLst>
           </p:cNvPr>
@@ -3285,7 +3285,7 @@
             </a:lvl1pPr>
           </a:lstStyle>
           <a:p>
-            <a:fld id="{0FC57F99-FC4C-44B4-A3C7-BF624CE3CBB2}" type="slidenum">
+            <a:fld id="{35C663DD-B40A-4BAB-AE30-2DFA18315334}" type="slidenum">
               <a:rPr kumimoji="1" lang="ja-JP" altLang="en-US" smtClean="0"/>
               <a:t>‹#›</a:t>
             </a:fld>
@@ -3296,7 +3296,7 @@
     </p:spTree>
     <p:extLst>
       <p:ext uri="{BB962C8B-B14F-4D97-AF65-F5344CB8AC3E}">
-        <p14:creationId xmlns:p14="http://schemas.microsoft.com/office/powerpoint/2010/main" val="2826398746"/>
+        <p14:creationId xmlns:p14="http://schemas.microsoft.com/office/powerpoint/2010/main" val="335139879"/>
       </p:ext>
     </p:extLst>
   </p:cSld>
@@ -3619,7 +3619,7 @@
           <p:cNvPr id="2" name="テキスト ボックス 1">
             <a:extLst>
               <a:ext uri="{FF2B5EF4-FFF2-40B4-BE49-F238E27FC236}">
-                <a16:creationId xmlns:a16="http://schemas.microsoft.com/office/drawing/2014/main" id="{2E4FDA19-EEFB-9F08-8A8C-E34F8C04915E}"/>
+                <a16:creationId xmlns:a16="http://schemas.microsoft.com/office/drawing/2014/main" id="{E0025148-2A5F-610E-9B67-0C83440B4DEA}"/>
               </a:ext>
             </a:extLst>
           </p:cNvPr>
@@ -3665,7 +3665,7 @@
           <p:cNvPr id="3" name="テキスト ボックス 2">
             <a:extLst>
               <a:ext uri="{FF2B5EF4-FFF2-40B4-BE49-F238E27FC236}">
-                <a16:creationId xmlns:a16="http://schemas.microsoft.com/office/drawing/2014/main" id="{92F34B05-AFA9-27F8-9C39-A0578A34DD70}"/>
+                <a16:creationId xmlns:a16="http://schemas.microsoft.com/office/drawing/2014/main" id="{3CE1C250-268A-4538-AF3A-B4885F39D11A}"/>
               </a:ext>
             </a:extLst>
           </p:cNvPr>
@@ -3714,7 +3714,7 @@
           <p:cNvPr id="4" name="テキスト ボックス 3">
             <a:extLst>
               <a:ext uri="{FF2B5EF4-FFF2-40B4-BE49-F238E27FC236}">
-                <a16:creationId xmlns:a16="http://schemas.microsoft.com/office/drawing/2014/main" id="{3538DB23-EAB5-C7BD-DB32-827EEBBA3699}"/>
+                <a16:creationId xmlns:a16="http://schemas.microsoft.com/office/drawing/2014/main" id="{FAEDBADD-C0DE-05B3-D9DF-9BB3F97A8278}"/>
               </a:ext>
             </a:extLst>
           </p:cNvPr>
@@ -3754,7 +3754,7 @@
           <p:cNvPr id="5" name="テキスト ボックス 4">
             <a:extLst>
               <a:ext uri="{FF2B5EF4-FFF2-40B4-BE49-F238E27FC236}">
-                <a16:creationId xmlns:a16="http://schemas.microsoft.com/office/drawing/2014/main" id="{591E51DD-9245-6362-C451-607D7BBE9325}"/>
+                <a16:creationId xmlns:a16="http://schemas.microsoft.com/office/drawing/2014/main" id="{580E704F-0C52-6676-449C-23F4C4287039}"/>
               </a:ext>
             </a:extLst>
           </p:cNvPr>
@@ -3801,7 +3801,7 @@
             <a:hlinkClick r:id="" action="ppaction://media"/>
             <a:extLst>
               <a:ext uri="{FF2B5EF4-FFF2-40B4-BE49-F238E27FC236}">
-                <a16:creationId xmlns:a16="http://schemas.microsoft.com/office/drawing/2014/main" id="{FE41E42C-46D0-1989-1A52-678CC1938CD7}"/>
+                <a16:creationId xmlns:a16="http://schemas.microsoft.com/office/drawing/2014/main" id="{A5C68888-AEB9-A8E5-8FB4-9049C0941172}"/>
               </a:ext>
             </a:extLst>
           </p:cNvPr>
@@ -3836,7 +3836,7 @@
     </p:spTree>
     <p:extLst>
       <p:ext uri="{BB962C8B-B14F-4D97-AF65-F5344CB8AC3E}">
-        <p14:creationId xmlns:p14="http://schemas.microsoft.com/office/powerpoint/2010/main" val="3651078106"/>
+        <p14:creationId xmlns:p14="http://schemas.microsoft.com/office/powerpoint/2010/main" val="3576346190"/>
       </p:ext>
     </p:extLst>
   </p:cSld>
@@ -3960,7 +3960,7 @@
           <p:cNvPr id="2" name="テキスト ボックス 1">
             <a:extLst>
               <a:ext uri="{FF2B5EF4-FFF2-40B4-BE49-F238E27FC236}">
-                <a16:creationId xmlns:a16="http://schemas.microsoft.com/office/drawing/2014/main" id="{16BF4735-9709-A1BE-6FD1-B3256138964D}"/>
+                <a16:creationId xmlns:a16="http://schemas.microsoft.com/office/drawing/2014/main" id="{141A6ED9-561A-2A91-6F9E-00F8F224E5DB}"/>
               </a:ext>
             </a:extLst>
           </p:cNvPr>
@@ -4006,7 +4006,7 @@
           <p:cNvPr id="3" name="テキスト ボックス 2">
             <a:extLst>
               <a:ext uri="{FF2B5EF4-FFF2-40B4-BE49-F238E27FC236}">
-                <a16:creationId xmlns:a16="http://schemas.microsoft.com/office/drawing/2014/main" id="{767E7573-0FC6-9362-A78D-4FA399F56797}"/>
+                <a16:creationId xmlns:a16="http://schemas.microsoft.com/office/drawing/2014/main" id="{AE96B703-DC09-749E-7A29-4AD22DED4CA9}"/>
               </a:ext>
             </a:extLst>
           </p:cNvPr>
@@ -4046,7 +4046,7 @@
           <p:cNvPr id="4" name="テキスト ボックス 3">
             <a:extLst>
               <a:ext uri="{FF2B5EF4-FFF2-40B4-BE49-F238E27FC236}">
-                <a16:creationId xmlns:a16="http://schemas.microsoft.com/office/drawing/2014/main" id="{C29086CA-DA5B-78EC-D69C-D31393C6A5D0}"/>
+                <a16:creationId xmlns:a16="http://schemas.microsoft.com/office/drawing/2014/main" id="{28B2830D-EB5A-6095-73E6-91407114BA38}"/>
               </a:ext>
             </a:extLst>
           </p:cNvPr>
@@ -4076,14 +4076,17 @@
                 </a:solidFill>
                 <a:latin typeface="Arial" panose="020B0604020202020204" pitchFamily="34" charset="0"/>
               </a:rPr>
-              <a:t>About Laravel Laravel is a web application framework with expressive, elegant syntax</a:t>
-            </a:r>
-            <a:endParaRPr kumimoji="1" lang="ja-JP" altLang="en-US" sz="2000">
-              <a:solidFill>
-                <a:srgbClr val="333333"/>
-              </a:solidFill>
-              <a:latin typeface="Arial" panose="020B0604020202020204" pitchFamily="34" charset="0"/>
-            </a:endParaRPr>
+              <a:t>Walkmap</a:t>
+            </a:r>
+            <a:r>
+              <a:rPr kumimoji="1" lang="ja-JP" altLang="en-US" sz="2000">
+                <a:solidFill>
+                  <a:srgbClr val="333333"/>
+                </a:solidFill>
+                <a:latin typeface="Arial" panose="020B0604020202020204" pitchFamily="34" charset="0"/>
+              </a:rPr>
+              <a:t>の目的、構成、実装を公開コードから確認できるプロジェクトです。</a:t>
+            </a:r>
           </a:p>
         </p:txBody>
       </p:sp>
@@ -4092,7 +4095,7 @@
           <p:cNvPr id="5" name="テキスト ボックス 4">
             <a:extLst>
               <a:ext uri="{FF2B5EF4-FFF2-40B4-BE49-F238E27FC236}">
-                <a16:creationId xmlns:a16="http://schemas.microsoft.com/office/drawing/2014/main" id="{E2097F30-44D9-8ACA-1148-AC320FE5ED5B}"/>
+                <a16:creationId xmlns:a16="http://schemas.microsoft.com/office/drawing/2014/main" id="{B5F31510-BABF-49FB-2AAD-F3F065F2A1DB}"/>
               </a:ext>
             </a:extLst>
           </p:cNvPr>
@@ -4139,7 +4142,7 @@
             <a:hlinkClick r:id="" action="ppaction://media"/>
             <a:extLst>
               <a:ext uri="{FF2B5EF4-FFF2-40B4-BE49-F238E27FC236}">
-                <a16:creationId xmlns:a16="http://schemas.microsoft.com/office/drawing/2014/main" id="{E5CB3731-3593-23C1-FBBB-E35075E250ED}"/>
+                <a16:creationId xmlns:a16="http://schemas.microsoft.com/office/drawing/2014/main" id="{E2FDE7F3-471E-09B3-0BE9-EF0B589E1ABC}"/>
               </a:ext>
             </a:extLst>
           </p:cNvPr>
@@ -4174,7 +4177,7 @@
     </p:spTree>
     <p:extLst>
       <p:ext uri="{BB962C8B-B14F-4D97-AF65-F5344CB8AC3E}">
-        <p14:creationId xmlns:p14="http://schemas.microsoft.com/office/powerpoint/2010/main" val="3133815066"/>
+        <p14:creationId xmlns:p14="http://schemas.microsoft.com/office/powerpoint/2010/main" val="100727434"/>
       </p:ext>
     </p:extLst>
   </p:cSld>
@@ -4183,10 +4186,10 @@
   </p:clrMapOvr>
   <mc:AlternateContent xmlns:mc="http://schemas.openxmlformats.org/markup-compatibility/2006">
     <mc:Choice xmlns:p14="http://schemas.microsoft.com/office/powerpoint/2010/main" Requires="p14">
-      <p:transition spd="slow" p14:dur="2000" advTm="8000"/>
+      <p:transition spd="slow" p14:dur="2000" advTm="7000"/>
     </mc:Choice>
     <mc:Fallback>
-      <p:transition spd="slow" advTm="8000"/>
+      <p:transition spd="slow" advTm="7000"/>
     </mc:Fallback>
   </mc:AlternateContent>
   <p:timing>
@@ -4217,7 +4220,7 @@
                                   <p:childTnLst>
                                     <p:cmd type="call" cmd="playFrom(0.0)">
                                       <p:cBhvr>
-                                        <p:cTn id="6" dur="7780" fill="hold"/>
+                                        <p:cTn id="6" dur="6981" fill="hold"/>
                                         <p:tgtEl>
                                           <p:spTgt spid="6"/>
                                         </p:tgtEl>
@@ -4298,7 +4301,7 @@
           <p:cNvPr id="2" name="テキスト ボックス 1">
             <a:extLst>
               <a:ext uri="{FF2B5EF4-FFF2-40B4-BE49-F238E27FC236}">
-                <a16:creationId xmlns:a16="http://schemas.microsoft.com/office/drawing/2014/main" id="{1435F47E-EBF3-573B-95C2-623CEEF883DC}"/>
+                <a16:creationId xmlns:a16="http://schemas.microsoft.com/office/drawing/2014/main" id="{2B72E3D3-7732-5063-21DC-FD3A97C2D1D0}"/>
               </a:ext>
             </a:extLst>
           </p:cNvPr>
@@ -4344,7 +4347,7 @@
           <p:cNvPr id="3" name="テキスト ボックス 2">
             <a:extLst>
               <a:ext uri="{FF2B5EF4-FFF2-40B4-BE49-F238E27FC236}">
-                <a16:creationId xmlns:a16="http://schemas.microsoft.com/office/drawing/2014/main" id="{1B719713-B5E6-20DD-6D0A-097CC783B9A1}"/>
+                <a16:creationId xmlns:a16="http://schemas.microsoft.com/office/drawing/2014/main" id="{2EFE1470-057A-990E-8B81-C83E1E45DECE}"/>
               </a:ext>
             </a:extLst>
           </p:cNvPr>
@@ -4384,7 +4387,7 @@
           <p:cNvPr id="4" name="テキスト ボックス 3">
             <a:extLst>
               <a:ext uri="{FF2B5EF4-FFF2-40B4-BE49-F238E27FC236}">
-                <a16:creationId xmlns:a16="http://schemas.microsoft.com/office/drawing/2014/main" id="{19CBC085-177D-A0D2-D8BE-1610A36C8FB4}"/>
+                <a16:creationId xmlns:a16="http://schemas.microsoft.com/office/drawing/2014/main" id="{353749F6-453E-E3C6-2F98-65E19D20BA20}"/>
               </a:ext>
             </a:extLst>
           </p:cNvPr>
@@ -4497,7 +4500,7 @@
           <p:cNvPr id="5" name="テキスト ボックス 4">
             <a:extLst>
               <a:ext uri="{FF2B5EF4-FFF2-40B4-BE49-F238E27FC236}">
-                <a16:creationId xmlns:a16="http://schemas.microsoft.com/office/drawing/2014/main" id="{1D156425-1F2E-A4FC-71C2-47BDF2D2EF9C}"/>
+                <a16:creationId xmlns:a16="http://schemas.microsoft.com/office/drawing/2014/main" id="{2E1E4A4D-3611-933F-32AF-9E7E98029329}"/>
               </a:ext>
             </a:extLst>
           </p:cNvPr>
@@ -4544,7 +4547,7 @@
             <a:hlinkClick r:id="" action="ppaction://media"/>
             <a:extLst>
               <a:ext uri="{FF2B5EF4-FFF2-40B4-BE49-F238E27FC236}">
-                <a16:creationId xmlns:a16="http://schemas.microsoft.com/office/drawing/2014/main" id="{4AAEED86-3EAF-0B36-B2E1-D6312285D12E}"/>
+                <a16:creationId xmlns:a16="http://schemas.microsoft.com/office/drawing/2014/main" id="{255EA56B-3129-AE31-0E95-67884264DDB0}"/>
               </a:ext>
             </a:extLst>
           </p:cNvPr>
@@ -4579,7 +4582,7 @@
     </p:spTree>
     <p:extLst>
       <p:ext uri="{BB962C8B-B14F-4D97-AF65-F5344CB8AC3E}">
-        <p14:creationId xmlns:p14="http://schemas.microsoft.com/office/powerpoint/2010/main" val="949382525"/>
+        <p14:creationId xmlns:p14="http://schemas.microsoft.com/office/powerpoint/2010/main" val="1904945256"/>
       </p:ext>
     </p:extLst>
   </p:cSld>
@@ -4703,7 +4706,7 @@
           <p:cNvPr id="2" name="テキスト ボックス 1">
             <a:extLst>
               <a:ext uri="{FF2B5EF4-FFF2-40B4-BE49-F238E27FC236}">
-                <a16:creationId xmlns:a16="http://schemas.microsoft.com/office/drawing/2014/main" id="{5DDC68DE-971C-B0DB-D29A-94540E6C97C4}"/>
+                <a16:creationId xmlns:a16="http://schemas.microsoft.com/office/drawing/2014/main" id="{41E6E311-1E6D-BCB1-425C-B60EEB946BBE}"/>
               </a:ext>
             </a:extLst>
           </p:cNvPr>
@@ -4749,7 +4752,7 @@
           <p:cNvPr id="3" name="テキスト ボックス 2">
             <a:extLst>
               <a:ext uri="{FF2B5EF4-FFF2-40B4-BE49-F238E27FC236}">
-                <a16:creationId xmlns:a16="http://schemas.microsoft.com/office/drawing/2014/main" id="{E5ACFEB2-9B7D-773E-50A9-2EC007305C9E}"/>
+                <a16:creationId xmlns:a16="http://schemas.microsoft.com/office/drawing/2014/main" id="{2EEF0B40-35E8-49FF-E299-510A6004B41C}"/>
               </a:ext>
             </a:extLst>
           </p:cNvPr>
@@ -4789,7 +4792,7 @@
           <p:cNvPr id="4" name="テキスト ボックス 3">
             <a:extLst>
               <a:ext uri="{FF2B5EF4-FFF2-40B4-BE49-F238E27FC236}">
-                <a16:creationId xmlns:a16="http://schemas.microsoft.com/office/drawing/2014/main" id="{E2A12B69-83FE-DBDB-183B-E39FB0B47976}"/>
+                <a16:creationId xmlns:a16="http://schemas.microsoft.com/office/drawing/2014/main" id="{5AAD1C38-D83D-6DA0-25D3-1D3F678614C0}"/>
               </a:ext>
             </a:extLst>
           </p:cNvPr>
@@ -4899,7 +4902,7 @@
           <p:cNvPr id="5" name="テキスト ボックス 4">
             <a:extLst>
               <a:ext uri="{FF2B5EF4-FFF2-40B4-BE49-F238E27FC236}">
-                <a16:creationId xmlns:a16="http://schemas.microsoft.com/office/drawing/2014/main" id="{25B89908-CFCD-CFDC-B91A-94C26B88ABF6}"/>
+                <a16:creationId xmlns:a16="http://schemas.microsoft.com/office/drawing/2014/main" id="{06847680-908A-783B-F9DC-0180A4657AFD}"/>
               </a:ext>
             </a:extLst>
           </p:cNvPr>
@@ -4946,7 +4949,7 @@
             <a:hlinkClick r:id="" action="ppaction://media"/>
             <a:extLst>
               <a:ext uri="{FF2B5EF4-FFF2-40B4-BE49-F238E27FC236}">
-                <a16:creationId xmlns:a16="http://schemas.microsoft.com/office/drawing/2014/main" id="{FED008B6-E86D-98CC-769A-D5441A4E7A07}"/>
+                <a16:creationId xmlns:a16="http://schemas.microsoft.com/office/drawing/2014/main" id="{D09B85BF-E48F-9E46-02F0-0BB18D5F39BA}"/>
               </a:ext>
             </a:extLst>
           </p:cNvPr>
@@ -4981,7 +4984,7 @@
     </p:spTree>
     <p:extLst>
       <p:ext uri="{BB962C8B-B14F-4D97-AF65-F5344CB8AC3E}">
-        <p14:creationId xmlns:p14="http://schemas.microsoft.com/office/powerpoint/2010/main" val="2718515250"/>
+        <p14:creationId xmlns:p14="http://schemas.microsoft.com/office/powerpoint/2010/main" val="623308446"/>
       </p:ext>
     </p:extLst>
   </p:cSld>
@@ -5105,7 +5108,7 @@
           <p:cNvPr id="2" name="テキスト ボックス 1">
             <a:extLst>
               <a:ext uri="{FF2B5EF4-FFF2-40B4-BE49-F238E27FC236}">
-                <a16:creationId xmlns:a16="http://schemas.microsoft.com/office/drawing/2014/main" id="{3D3D1B5D-A3D9-BBB7-8133-244DD2BAE55B}"/>
+                <a16:creationId xmlns:a16="http://schemas.microsoft.com/office/drawing/2014/main" id="{7017E166-5473-0B89-E5DC-E7A4A20886FA}"/>
               </a:ext>
             </a:extLst>
           </p:cNvPr>
@@ -5151,7 +5154,7 @@
           <p:cNvPr id="3" name="テキスト ボックス 2">
             <a:extLst>
               <a:ext uri="{FF2B5EF4-FFF2-40B4-BE49-F238E27FC236}">
-                <a16:creationId xmlns:a16="http://schemas.microsoft.com/office/drawing/2014/main" id="{2063DD13-31F5-11FC-084D-686AB66849ED}"/>
+                <a16:creationId xmlns:a16="http://schemas.microsoft.com/office/drawing/2014/main" id="{004E317B-953D-6C6E-D812-765108E44458}"/>
               </a:ext>
             </a:extLst>
           </p:cNvPr>
@@ -5191,7 +5194,7 @@
           <p:cNvPr id="4" name="テキスト ボックス 3">
             <a:extLst>
               <a:ext uri="{FF2B5EF4-FFF2-40B4-BE49-F238E27FC236}">
-                <a16:creationId xmlns:a16="http://schemas.microsoft.com/office/drawing/2014/main" id="{25FDC226-D84F-8CDA-121E-A5BA29E7FE6C}"/>
+                <a16:creationId xmlns:a16="http://schemas.microsoft.com/office/drawing/2014/main" id="{F49A7C0E-106F-0593-0A66-88ACA42E6DC5}"/>
               </a:ext>
             </a:extLst>
           </p:cNvPr>
@@ -5215,56 +5218,14 @@
           <a:lstStyle/>
           <a:p>
             <a:r>
-              <a:rPr kumimoji="1" lang="en-US" altLang="ja-JP" sz="2000">
-                <a:solidFill>
-                  <a:srgbClr val="333333"/>
-                </a:solidFill>
-                <a:latin typeface="Arial" panose="020B0604020202020204" pitchFamily="34" charset="0"/>
-              </a:rPr>
-              <a:t>LINE</a:t>
-            </a:r>
-            <a:r>
               <a:rPr kumimoji="1" lang="ja-JP" altLang="en-US" sz="2000">
                 <a:solidFill>
                   <a:srgbClr val="333333"/>
                 </a:solidFill>
                 <a:latin typeface="Arial" panose="020B0604020202020204" pitchFamily="34" charset="0"/>
               </a:rPr>
-              <a:t>混雑度通知を追加</a:t>
-            </a:r>
-            <a:r>
-              <a:rPr kumimoji="1" lang="en-US" altLang="ja-JP" sz="2000">
-                <a:solidFill>
-                  <a:srgbClr val="333333"/>
-                </a:solidFill>
-                <a:latin typeface="Arial" panose="020B0604020202020204" pitchFamily="34" charset="0"/>
-              </a:rPr>
-              <a:t>(</a:t>
-            </a:r>
-            <a:r>
-              <a:rPr kumimoji="1" lang="ja-JP" altLang="en-US" sz="2000">
-                <a:solidFill>
-                  <a:srgbClr val="333333"/>
-                </a:solidFill>
-                <a:latin typeface="Arial" panose="020B0604020202020204" pitchFamily="34" charset="0"/>
-              </a:rPr>
-              <a:t>住宅展示場など予約サイトにない情報の差別化</a:t>
-            </a:r>
-            <a:r>
-              <a:rPr kumimoji="1" lang="en-US" altLang="ja-JP" sz="2000">
-                <a:solidFill>
-                  <a:srgbClr val="333333"/>
-                </a:solidFill>
-                <a:latin typeface="Arial" panose="020B0604020202020204" pitchFamily="34" charset="0"/>
-              </a:rPr>
-              <a:t>)</a:t>
-            </a:r>
-            <a:endParaRPr kumimoji="1" lang="ja-JP" altLang="en-US" sz="2000">
-              <a:solidFill>
-                <a:srgbClr val="333333"/>
-              </a:solidFill>
-              <a:latin typeface="Arial" panose="020B0604020202020204" pitchFamily="34" charset="0"/>
-            </a:endParaRPr>
+              <a:t>直近のコミットでは、実装の見直しと継続的な改善が行われました。</a:t>
+            </a:r>
           </a:p>
         </p:txBody>
       </p:sp>
@@ -5273,7 +5234,7 @@
           <p:cNvPr id="5" name="テキスト ボックス 4">
             <a:extLst>
               <a:ext uri="{FF2B5EF4-FFF2-40B4-BE49-F238E27FC236}">
-                <a16:creationId xmlns:a16="http://schemas.microsoft.com/office/drawing/2014/main" id="{B220F5C5-CE23-692D-5BCE-354C7A19C5CA}"/>
+                <a16:creationId xmlns:a16="http://schemas.microsoft.com/office/drawing/2014/main" id="{0A9F265D-81B8-5FA1-AC0F-E2EA8BC8EC8B}"/>
               </a:ext>
             </a:extLst>
           </p:cNvPr>
@@ -5320,7 +5281,7 @@
             <a:hlinkClick r:id="" action="ppaction://media"/>
             <a:extLst>
               <a:ext uri="{FF2B5EF4-FFF2-40B4-BE49-F238E27FC236}">
-                <a16:creationId xmlns:a16="http://schemas.microsoft.com/office/drawing/2014/main" id="{5E68C924-39D8-6BA8-0237-DF3258EA68FA}"/>
+                <a16:creationId xmlns:a16="http://schemas.microsoft.com/office/drawing/2014/main" id="{5D6F20AE-36CD-E7AE-C928-DDD03925ECE4}"/>
               </a:ext>
             </a:extLst>
           </p:cNvPr>
@@ -5355,7 +5316,7 @@
     </p:spTree>
     <p:extLst>
       <p:ext uri="{BB962C8B-B14F-4D97-AF65-F5344CB8AC3E}">
-        <p14:creationId xmlns:p14="http://schemas.microsoft.com/office/powerpoint/2010/main" val="1912182255"/>
+        <p14:creationId xmlns:p14="http://schemas.microsoft.com/office/powerpoint/2010/main" val="924006697"/>
       </p:ext>
     </p:extLst>
   </p:cSld>
@@ -5364,10 +5325,10 @@
   </p:clrMapOvr>
   <mc:AlternateContent xmlns:mc="http://schemas.openxmlformats.org/markup-compatibility/2006">
     <mc:Choice xmlns:p14="http://schemas.microsoft.com/office/powerpoint/2010/main" Requires="p14">
-      <p:transition spd="slow" p14:dur="2000" advTm="11000"/>
+      <p:transition spd="slow" p14:dur="2000" advTm="7000"/>
     </mc:Choice>
     <mc:Fallback>
-      <p:transition spd="slow" advTm="11000"/>
+      <p:transition spd="slow" advTm="7000"/>
     </mc:Fallback>
   </mc:AlternateContent>
   <p:timing>
@@ -5398,7 +5359,7 @@
                                   <p:childTnLst>
                                     <p:cmd type="call" cmd="playFrom(0.0)">
                                       <p:cBhvr>
-                                        <p:cTn id="6" dur="10415" fill="hold"/>
+                                        <p:cTn id="6" dur="6076" fill="hold"/>
                                         <p:tgtEl>
                                           <p:spTgt spid="6"/>
                                         </p:tgtEl>
@@ -5479,7 +5440,7 @@
           <p:cNvPr id="2" name="テキスト ボックス 1">
             <a:extLst>
               <a:ext uri="{FF2B5EF4-FFF2-40B4-BE49-F238E27FC236}">
-                <a16:creationId xmlns:a16="http://schemas.microsoft.com/office/drawing/2014/main" id="{4E0C3A2D-3E4D-4F2C-62A0-B774319579BD}"/>
+                <a16:creationId xmlns:a16="http://schemas.microsoft.com/office/drawing/2014/main" id="{451AF6EE-5964-B056-0BDF-D5BBDA3686D5}"/>
               </a:ext>
             </a:extLst>
           </p:cNvPr>
@@ -5525,7 +5486,7 @@
           <p:cNvPr id="3" name="テキスト ボックス 2">
             <a:extLst>
               <a:ext uri="{FF2B5EF4-FFF2-40B4-BE49-F238E27FC236}">
-                <a16:creationId xmlns:a16="http://schemas.microsoft.com/office/drawing/2014/main" id="{36C29AB9-D7C2-4D22-04EE-98C10EB60F70}"/>
+                <a16:creationId xmlns:a16="http://schemas.microsoft.com/office/drawing/2014/main" id="{DD76940B-9008-5C88-6E96-9132DEBD5EC4}"/>
               </a:ext>
             </a:extLst>
           </p:cNvPr>
@@ -5565,7 +5526,7 @@
           <p:cNvPr id="4" name="テキスト ボックス 3">
             <a:extLst>
               <a:ext uri="{FF2B5EF4-FFF2-40B4-BE49-F238E27FC236}">
-                <a16:creationId xmlns:a16="http://schemas.microsoft.com/office/drawing/2014/main" id="{F9A46798-D347-3916-1759-95BE7C541D02}"/>
+                <a16:creationId xmlns:a16="http://schemas.microsoft.com/office/drawing/2014/main" id="{7876B50B-06C2-E3D5-37B5-9107917034E3}"/>
               </a:ext>
             </a:extLst>
           </p:cNvPr>
@@ -5630,7 +5591,7 @@
           <p:cNvPr id="5" name="テキスト ボックス 4">
             <a:extLst>
               <a:ext uri="{FF2B5EF4-FFF2-40B4-BE49-F238E27FC236}">
-                <a16:creationId xmlns:a16="http://schemas.microsoft.com/office/drawing/2014/main" id="{980BBBC2-9F09-2BE9-C0FF-E2FC4BB610EE}"/>
+                <a16:creationId xmlns:a16="http://schemas.microsoft.com/office/drawing/2014/main" id="{24C4620B-61C2-4CF6-641B-A7DCDC068582}"/>
               </a:ext>
             </a:extLst>
           </p:cNvPr>
@@ -5677,7 +5638,7 @@
             <a:hlinkClick r:id="" action="ppaction://media"/>
             <a:extLst>
               <a:ext uri="{FF2B5EF4-FFF2-40B4-BE49-F238E27FC236}">
-                <a16:creationId xmlns:a16="http://schemas.microsoft.com/office/drawing/2014/main" id="{3181A17E-F474-3D0E-C1E5-756905FBCB8D}"/>
+                <a16:creationId xmlns:a16="http://schemas.microsoft.com/office/drawing/2014/main" id="{89866D7C-2909-A6ED-B95E-8786D25DD493}"/>
               </a:ext>
             </a:extLst>
           </p:cNvPr>
@@ -5712,7 +5673,7 @@
     </p:spTree>
     <p:extLst>
       <p:ext uri="{BB962C8B-B14F-4D97-AF65-F5344CB8AC3E}">
-        <p14:creationId xmlns:p14="http://schemas.microsoft.com/office/powerpoint/2010/main" val="1962797335"/>
+        <p14:creationId xmlns:p14="http://schemas.microsoft.com/office/powerpoint/2010/main" val="2455908013"/>
       </p:ext>
     </p:extLst>
   </p:cSld>
